--- a/M&A/カンテサンス/カンテサンス_SPCスキーム図_AM型.pptx
+++ b/M&A/カンテサンス/カンテサンス_SPCスキーム図_AM型.pptx
@@ -986,7 +986,7 @@
                 <a:ea typeface="Calibri" pitchFamily="34" charset="-122"/>
                 <a:cs typeface="Calibri" pitchFamily="34" charset="-120"/>
               </a:rPr>
-              <a:t>SPCがみずほ銀行のLBOローンと投資家の出資で約30億円（EV相当）を用意し、全株式を取得。WineBankはSPCのAMを受託する。</a:t>
+              <a:t>みずほ銀行の借入を原資とするWineBank・アピシウスの出資と、投資家様の出資により、SPCが約30億円（EV相当）を用意し全株式を取得。</a:t>
             </a:r>
             <a:endParaRPr lang="en-US" sz="1200" dirty="0"/>
           </a:p>
@@ -1052,7 +1052,7 @@
                 <a:ea typeface="Calibri" pitchFamily="34" charset="-122"/>
                 <a:cs typeface="Calibri" pitchFamily="34" charset="-120"/>
               </a:rPr>
-              <a:t>投資家</a:t>
+              <a:t>投資家様</a:t>
             </a:r>
             <a:endParaRPr lang="en-US" sz="1250" dirty="0"/>
           </a:p>
@@ -1194,12 +1194,12 @@
         </p:nvSpPr>
         <p:spPr>
           <a:xfrm>
-            <a:off x="566928" y="2670048"/>
-            <a:ext cx="2468880" cy="914400"/>
+            <a:off x="566928" y="1481328"/>
+            <a:ext cx="2468880" cy="713232"/>
           </a:xfrm>
           <a:prstGeom prst="roundRect">
             <a:avLst>
-              <a:gd name="adj" fmla="val 5000"/>
+              <a:gd name="adj" fmla="val 6410"/>
             </a:avLst>
           </a:prstGeom>
           <a:solidFill>
@@ -1221,7 +1221,7 @@
         </p:nvSpPr>
         <p:spPr>
           <a:xfrm>
-            <a:off x="676656" y="2779776"/>
+            <a:off x="676656" y="1591056"/>
             <a:ext cx="2249424" cy="274320"/>
           </a:xfrm>
           <a:prstGeom prst="rect">
@@ -1260,8 +1260,8 @@
         </p:nvSpPr>
         <p:spPr>
           <a:xfrm>
-            <a:off x="658368" y="3072384"/>
-            <a:ext cx="2286000" cy="438912"/>
+            <a:off x="658368" y="1883664"/>
+            <a:ext cx="2286000" cy="237744"/>
           </a:xfrm>
           <a:prstGeom prst="rect">
             <a:avLst/>
@@ -1297,6 +1297,180 @@
       <p:sp>
         <p:nvSpPr>
           <p:cNvPr id="13" name="Shape 11"/>
+          <p:cNvSpPr/>
+          <p:nvPr/>
+        </p:nvSpPr>
+        <p:spPr>
+          <a:xfrm>
+            <a:off x="1801368" y="2194560"/>
+            <a:ext cx="0" cy="475488"/>
+          </a:xfrm>
+          <a:prstGeom prst="line">
+            <a:avLst/>
+          </a:prstGeom>
+          <a:noFill/>
+          <a:ln w="19050">
+            <a:solidFill>
+              <a:srgbClr val="A26769"/>
+            </a:solidFill>
+            <a:prstDash val="solid"/>
+            <a:tailEnd type="triangle"/>
+          </a:ln>
+        </p:spPr>
+      </p:sp>
+      <p:sp>
+        <p:nvSpPr>
+          <p:cNvPr id="14" name="Text 12"/>
+          <p:cNvSpPr txBox="1"/>
+          <p:nvPr/>
+        </p:nvSpPr>
+        <p:spPr>
+          <a:xfrm>
+            <a:off x="1892808" y="2231136"/>
+            <a:ext cx="1645920" cy="201168"/>
+          </a:xfrm>
+          <a:prstGeom prst="rect">
+            <a:avLst/>
+          </a:prstGeom>
+          <a:noFill/>
+          <a:ln/>
+        </p:spPr>
+        <p:txBody>
+          <a:bodyPr wrap="square" lIns="0" tIns="0" rIns="0" bIns="0" rtlCol="0" anchor="ctr"/>
+          <a:lstStyle/>
+          <a:p>
+            <a:pPr algn="l" indent="0" marL="0">
+              <a:lnSpc>
+                <a:spcPts val="1100"/>
+              </a:lnSpc>
+              <a:buNone/>
+            </a:pPr>
+            <a:r>
+              <a:rPr lang="en-US" sz="850" b="1" dirty="0">
+                <a:solidFill>
+                  <a:srgbClr val="6D2E46"/>
+                </a:solidFill>
+                <a:latin typeface="Calibri" pitchFamily="34" charset="0"/>
+                <a:ea typeface="Calibri" pitchFamily="34" charset="-122"/>
+                <a:cs typeface="Calibri" pitchFamily="34" charset="-120"/>
+              </a:rPr>
+              <a:t>借入 15〜20億円</a:t>
+            </a:r>
+            <a:endParaRPr lang="en-US" sz="850" dirty="0"/>
+          </a:p>
+        </p:txBody>
+      </p:sp>
+      <p:sp>
+        <p:nvSpPr>
+          <p:cNvPr id="15" name="Shape 13"/>
+          <p:cNvSpPr/>
+          <p:nvPr/>
+        </p:nvSpPr>
+        <p:spPr>
+          <a:xfrm>
+            <a:off x="566928" y="2670048"/>
+            <a:ext cx="2468880" cy="914400"/>
+          </a:xfrm>
+          <a:prstGeom prst="roundRect">
+            <a:avLst>
+              <a:gd name="adj" fmla="val 5000"/>
+            </a:avLst>
+          </a:prstGeom>
+          <a:solidFill>
+            <a:srgbClr val="F7F3F4"/>
+          </a:solidFill>
+          <a:ln w="15875">
+            <a:solidFill>
+              <a:srgbClr val="6D2E46"/>
+            </a:solidFill>
+            <a:prstDash val="solid"/>
+          </a:ln>
+        </p:spPr>
+      </p:sp>
+      <p:sp>
+        <p:nvSpPr>
+          <p:cNvPr id="16" name="Text 14"/>
+          <p:cNvSpPr txBox="1"/>
+          <p:nvPr/>
+        </p:nvSpPr>
+        <p:spPr>
+          <a:xfrm>
+            <a:off x="676656" y="2779776"/>
+            <a:ext cx="2249424" cy="274320"/>
+          </a:xfrm>
+          <a:prstGeom prst="rect">
+            <a:avLst/>
+          </a:prstGeom>
+          <a:noFill/>
+          <a:ln/>
+        </p:spPr>
+        <p:txBody>
+          <a:bodyPr wrap="square" lIns="0" tIns="0" rIns="0" bIns="0" rtlCol="0" anchor="ctr"/>
+          <a:lstStyle/>
+          <a:p>
+            <a:pPr algn="ctr" indent="0" marL="0">
+              <a:buNone/>
+            </a:pPr>
+            <a:r>
+              <a:rPr lang="en-US" sz="1200" b="1" dirty="0">
+                <a:solidFill>
+                  <a:srgbClr val="1F1A1C"/>
+                </a:solidFill>
+                <a:latin typeface="Calibri" pitchFamily="34" charset="0"/>
+                <a:ea typeface="Calibri" pitchFamily="34" charset="-122"/>
+                <a:cs typeface="Calibri" pitchFamily="34" charset="-120"/>
+              </a:rPr>
+              <a:t>WineBank ⇒ アピシウス</a:t>
+            </a:r>
+            <a:endParaRPr lang="en-US" sz="1200" dirty="0"/>
+          </a:p>
+        </p:txBody>
+      </p:sp>
+      <p:sp>
+        <p:nvSpPr>
+          <p:cNvPr id="17" name="Text 15"/>
+          <p:cNvSpPr txBox="1"/>
+          <p:nvPr/>
+        </p:nvSpPr>
+        <p:spPr>
+          <a:xfrm>
+            <a:off x="658368" y="3072384"/>
+            <a:ext cx="2286000" cy="438912"/>
+          </a:xfrm>
+          <a:prstGeom prst="rect">
+            <a:avLst/>
+          </a:prstGeom>
+          <a:noFill/>
+          <a:ln/>
+        </p:spPr>
+        <p:txBody>
+          <a:bodyPr wrap="square" lIns="0" tIns="0" rIns="0" bIns="0" rtlCol="0" anchor="ctr"/>
+          <a:lstStyle/>
+          <a:p>
+            <a:pPr algn="ctr" indent="0" marL="0">
+              <a:lnSpc>
+                <a:spcPts val="1200"/>
+              </a:lnSpc>
+              <a:buNone/>
+            </a:pPr>
+            <a:r>
+              <a:rPr lang="en-US" sz="900" dirty="0">
+                <a:solidFill>
+                  <a:srgbClr val="6E6368"/>
+                </a:solidFill>
+                <a:latin typeface="Calibri" pitchFamily="34" charset="0"/>
+                <a:ea typeface="Calibri" pitchFamily="34" charset="-122"/>
+                <a:cs typeface="Calibri" pitchFamily="34" charset="-120"/>
+              </a:rPr>
+              <a:t>借入資金をSPCへ出資</a:t>
+            </a:r>
+            <a:endParaRPr lang="en-US" sz="900" dirty="0"/>
+          </a:p>
+        </p:txBody>
+      </p:sp>
+      <p:sp>
+        <p:nvSpPr>
+          <p:cNvPr id="18" name="Shape 16"/>
           <p:cNvSpPr/>
           <p:nvPr/>
         </p:nvSpPr>
@@ -1323,7 +1497,7 @@
       </p:sp>
       <p:sp>
         <p:nvSpPr>
-          <p:cNvPr id="14" name="Text 12"/>
+          <p:cNvPr id="19" name="Text 17"/>
           <p:cNvSpPr txBox="1"/>
           <p:nvPr/>
         </p:nvSpPr>
@@ -1362,7 +1536,7 @@
       </p:sp>
       <p:sp>
         <p:nvSpPr>
-          <p:cNvPr id="15" name="Text 13"/>
+          <p:cNvPr id="20" name="Text 18"/>
           <p:cNvSpPr txBox="1"/>
           <p:nvPr/>
         </p:nvSpPr>
@@ -1404,7 +1578,7 @@
       </p:sp>
       <p:sp>
         <p:nvSpPr>
-          <p:cNvPr id="16" name="Shape 14"/>
+          <p:cNvPr id="21" name="Shape 19"/>
           <p:cNvSpPr/>
           <p:nvPr/>
         </p:nvSpPr>
@@ -1431,7 +1605,7 @@
       </p:sp>
       <p:sp>
         <p:nvSpPr>
-          <p:cNvPr id="17" name="Text 15"/>
+          <p:cNvPr id="22" name="Text 20"/>
           <p:cNvSpPr txBox="1"/>
           <p:nvPr/>
         </p:nvSpPr>
@@ -1470,7 +1644,7 @@
       </p:sp>
       <p:sp>
         <p:nvSpPr>
-          <p:cNvPr id="18" name="Text 16"/>
+          <p:cNvPr id="23" name="Text 21"/>
           <p:cNvSpPr txBox="1"/>
           <p:nvPr/>
         </p:nvSpPr>
@@ -1512,7 +1686,7 @@
       </p:sp>
       <p:sp>
         <p:nvSpPr>
-          <p:cNvPr id="19" name="Shape 17"/>
+          <p:cNvPr id="24" name="Shape 22"/>
           <p:cNvSpPr/>
           <p:nvPr/>
         </p:nvSpPr>
@@ -1536,7 +1710,7 @@
       </p:sp>
       <p:sp>
         <p:nvSpPr>
-          <p:cNvPr id="20" name="Text 18"/>
+          <p:cNvPr id="25" name="Text 23"/>
           <p:cNvSpPr txBox="1"/>
           <p:nvPr/>
         </p:nvSpPr>
@@ -1570,7 +1744,7 @@
                 <a:ea typeface="Calibri" pitchFamily="34" charset="-122"/>
                 <a:cs typeface="Calibri" pitchFamily="34" charset="-120"/>
               </a:rPr>
-              <a:t>LBOローン</a:t>
+              <a:t>出資</a:t>
             </a:r>
             <a:endParaRPr lang="en-US" sz="850" dirty="0"/>
           </a:p>
@@ -1598,7 +1772,7 @@
       </p:sp>
       <p:sp>
         <p:nvSpPr>
-          <p:cNvPr id="21" name="Text 19"/>
+          <p:cNvPr id="26" name="Text 24"/>
           <p:cNvSpPr txBox="1"/>
           <p:nvPr/>
         </p:nvSpPr>
@@ -1660,7 +1834,7 @@
       </p:sp>
       <p:sp>
         <p:nvSpPr>
-          <p:cNvPr id="22" name="Shape 20"/>
+          <p:cNvPr id="27" name="Shape 25"/>
           <p:cNvSpPr/>
           <p:nvPr/>
         </p:nvSpPr>
@@ -1684,7 +1858,7 @@
       </p:sp>
       <p:sp>
         <p:nvSpPr>
-          <p:cNvPr id="23" name="Text 21"/>
+          <p:cNvPr id="28" name="Text 26"/>
           <p:cNvSpPr txBox="1"/>
           <p:nvPr/>
         </p:nvSpPr>
@@ -1726,7 +1900,7 @@
       </p:sp>
       <p:sp>
         <p:nvSpPr>
-          <p:cNvPr id="24" name="Shape 22"/>
+          <p:cNvPr id="29" name="Shape 27"/>
           <p:cNvSpPr/>
           <p:nvPr/>
         </p:nvSpPr>
@@ -1750,7 +1924,7 @@
       </p:sp>
       <p:sp>
         <p:nvSpPr>
-          <p:cNvPr id="25" name="Text 23"/>
+          <p:cNvPr id="30" name="Text 28"/>
           <p:cNvSpPr txBox="1"/>
           <p:nvPr/>
         </p:nvSpPr>
@@ -1812,7 +1986,7 @@
       </p:sp>
       <p:sp>
         <p:nvSpPr>
-          <p:cNvPr id="26" name="Shape 24"/>
+          <p:cNvPr id="31" name="Shape 29"/>
           <p:cNvSpPr/>
           <p:nvPr/>
         </p:nvSpPr>
@@ -1836,7 +2010,7 @@
       </p:sp>
       <p:sp>
         <p:nvSpPr>
-          <p:cNvPr id="27" name="Text 25"/>
+          <p:cNvPr id="32" name="Text 30"/>
           <p:cNvSpPr txBox="1"/>
           <p:nvPr/>
         </p:nvSpPr>
@@ -1878,7 +2052,7 @@
       </p:sp>
       <p:sp>
         <p:nvSpPr>
-          <p:cNvPr id="28" name="Shape 26"/>
+          <p:cNvPr id="33" name="Shape 31"/>
           <p:cNvSpPr/>
           <p:nvPr/>
         </p:nvSpPr>
@@ -1905,7 +2079,7 @@
       </p:sp>
       <p:sp>
         <p:nvSpPr>
-          <p:cNvPr id="29" name="Text 27"/>
+          <p:cNvPr id="34" name="Text 32"/>
           <p:cNvSpPr txBox="1"/>
           <p:nvPr/>
         </p:nvSpPr>
@@ -1944,7 +2118,7 @@
       </p:sp>
       <p:sp>
         <p:nvSpPr>
-          <p:cNvPr id="30" name="Text 28"/>
+          <p:cNvPr id="35" name="Text 33"/>
           <p:cNvSpPr txBox="1"/>
           <p:nvPr/>
         </p:nvSpPr>
@@ -1978,7 +2152,7 @@
                 <a:ea typeface="Calibri" pitchFamily="34" charset="-122"/>
                 <a:cs typeface="Calibri" pitchFamily="34" charset="-120"/>
               </a:rPr>
-              <a:t>LBOローンは合併後の事業キャッシュフローから返済</a:t>
+              <a:t>みずほへの返済は合併後の事業キャッシュフローが原資</a:t>
             </a:r>
             <a:endParaRPr lang="en-US" sz="900" dirty="0"/>
           </a:p>
@@ -1986,7 +2160,7 @@
       </p:sp>
       <p:sp>
         <p:nvSpPr>
-          <p:cNvPr id="31" name="Shape 29"/>
+          <p:cNvPr id="36" name="Shape 34"/>
           <p:cNvSpPr/>
           <p:nvPr/>
         </p:nvSpPr>
@@ -2013,7 +2187,7 @@
       </p:sp>
       <p:sp>
         <p:nvSpPr>
-          <p:cNvPr id="32" name="Text 30"/>
+          <p:cNvPr id="37" name="Text 35"/>
           <p:cNvSpPr txBox="1"/>
           <p:nvPr/>
         </p:nvSpPr>
@@ -2052,7 +2226,7 @@
       </p:sp>
       <p:sp>
         <p:nvSpPr>
-          <p:cNvPr id="33" name="Text 31"/>
+          <p:cNvPr id="38" name="Text 36"/>
           <p:cNvSpPr txBox="1"/>
           <p:nvPr/>
         </p:nvSpPr>
@@ -2086,7 +2260,7 @@
                 <a:ea typeface="Calibri" pitchFamily="34" charset="-122"/>
                 <a:cs typeface="Calibri" pitchFamily="34" charset="-120"/>
               </a:rPr>
-              <a:t>SPCのアセットマネージャー（AM）</a:t>
+              <a:t>アセットマネージャー（AM）</a:t>
             </a:r>
             <a:endParaRPr lang="en-US" sz="900" dirty="0"/>
           </a:p>
@@ -2094,7 +2268,7 @@
       </p:sp>
       <p:sp>
         <p:nvSpPr>
-          <p:cNvPr id="34" name="Shape 32"/>
+          <p:cNvPr id="39" name="Shape 37"/>
           <p:cNvSpPr/>
           <p:nvPr/>
         </p:nvSpPr>
@@ -2118,7 +2292,7 @@
       </p:sp>
       <p:sp>
         <p:nvSpPr>
-          <p:cNvPr id="35" name="Text 33"/>
+          <p:cNvPr id="40" name="Text 38"/>
           <p:cNvSpPr txBox="1"/>
           <p:nvPr/>
         </p:nvSpPr>
@@ -2180,7 +2354,7 @@
       </p:sp>
       <p:sp>
         <p:nvSpPr>
-          <p:cNvPr id="36" name="Shape 34"/>
+          <p:cNvPr id="41" name="Shape 39"/>
           <p:cNvSpPr/>
           <p:nvPr/>
         </p:nvSpPr>
@@ -2204,7 +2378,7 @@
       </p:sp>
       <p:sp>
         <p:nvSpPr>
-          <p:cNvPr id="37" name="Text 35"/>
+          <p:cNvPr id="42" name="Text 40"/>
           <p:cNvSpPr txBox="1"/>
           <p:nvPr/>
         </p:nvSpPr>
@@ -2246,7 +2420,7 @@
       </p:sp>
       <p:sp>
         <p:nvSpPr>
-          <p:cNvPr id="38" name="Shape 36"/>
+          <p:cNvPr id="43" name="Shape 41"/>
           <p:cNvSpPr/>
           <p:nvPr/>
         </p:nvSpPr>
@@ -2273,7 +2447,7 @@
       </p:sp>
       <p:sp>
         <p:nvSpPr>
-          <p:cNvPr id="39" name="Text 37"/>
+          <p:cNvPr id="44" name="Text 42"/>
           <p:cNvSpPr txBox="1"/>
           <p:nvPr/>
         </p:nvSpPr>
@@ -2367,7 +2541,7 @@
       </p:sp>
       <p:sp>
         <p:nvSpPr>
-          <p:cNvPr id="40" name="Text 38"/>
+          <p:cNvPr id="45" name="Text 43"/>
           <p:cNvSpPr txBox="1"/>
           <p:nvPr/>
         </p:nvSpPr>
@@ -2427,8 +2601,8 @@
             <a:tbl>
               <a:tblPr/>
               <a:tblGrid>
-                <a:gridCol w="1371600"/>
-                <a:gridCol w="1005840"/>
+                <a:gridCol w="1463040"/>
+                <a:gridCol w="914400"/>
                 <a:gridCol w="914400"/>
               </a:tblGrid>
               <a:tr h="237744">
@@ -2449,7 +2623,7 @@
                           <a:ea typeface="Calibri" pitchFamily="34" charset="-122"/>
                           <a:cs typeface="Calibri" pitchFamily="34" charset="-120"/>
                         </a:rPr>
-                        <a:t>調達</a:t>
+                        <a:t>出資者</a:t>
                       </a:r>
                       <a:endParaRPr lang="en-US" sz="900" dirty="0">
                         <a:latin typeface="Calibri" charset="0"/>
@@ -2517,7 +2691,7 @@
                           <a:ea typeface="Calibri" pitchFamily="34" charset="-122"/>
                           <a:cs typeface="Calibri" pitchFamily="34" charset="-120"/>
                         </a:rPr>
-                        <a:t>金額</a:t>
+                        <a:t>出資額</a:t>
                       </a:r>
                       <a:endParaRPr lang="en-US" sz="900" dirty="0">
                         <a:latin typeface="Calibri" charset="0"/>
@@ -2655,7 +2829,7 @@
                           <a:ea typeface="Calibri" pitchFamily="34" charset="-122"/>
                           <a:cs typeface="Calibri" pitchFamily="34" charset="-120"/>
                         </a:rPr>
-                        <a:t>LBOローン（みずほ）</a:t>
+                        <a:t>WineBank・アピシウス</a:t>
                       </a:r>
                       <a:endParaRPr lang="en-US" sz="850" dirty="0">
                         <a:latin typeface="Calibri" charset="0"/>
@@ -2852,7 +3026,7 @@
                           <a:ea typeface="Calibri" pitchFamily="34" charset="-122"/>
                           <a:cs typeface="Calibri" pitchFamily="34" charset="-120"/>
                         </a:rPr>
-                        <a:t>投資家の出資</a:t>
+                        <a:t>投資家様</a:t>
                       </a:r>
                       <a:endParaRPr lang="en-US" sz="850" dirty="0">
                         <a:latin typeface="Calibri" charset="0"/>
@@ -3243,7 +3417,7 @@
       </p:graphicFrame>
       <p:sp>
         <p:nvSpPr>
-          <p:cNvPr id="42" name="Text 39"/>
+          <p:cNvPr id="47" name="Text 44"/>
           <p:cNvSpPr txBox="1"/>
           <p:nvPr/>
         </p:nvSpPr>
@@ -3282,7 +3456,7 @@
       </p:sp>
       <p:sp>
         <p:nvSpPr>
-          <p:cNvPr id="43" name="Shape 40"/>
+          <p:cNvPr id="48" name="Shape 45"/>
           <p:cNvSpPr/>
           <p:nvPr/>
         </p:nvSpPr>
@@ -3309,7 +3483,7 @@
       </p:sp>
       <p:sp>
         <p:nvSpPr>
-          <p:cNvPr id="44" name="Text 41"/>
+          <p:cNvPr id="49" name="Text 46"/>
           <p:cNvSpPr txBox="1"/>
           <p:nvPr/>
         </p:nvSpPr>
@@ -3348,7 +3522,7 @@
       </p:sp>
       <p:sp>
         <p:nvSpPr>
-          <p:cNvPr id="45" name="Text 42"/>
+          <p:cNvPr id="50" name="Text 47"/>
           <p:cNvSpPr txBox="1"/>
           <p:nvPr/>
         </p:nvSpPr>
@@ -3387,7 +3561,7 @@
       </p:sp>
       <p:sp>
         <p:nvSpPr>
-          <p:cNvPr id="46" name="Shape 43"/>
+          <p:cNvPr id="51" name="Shape 48"/>
           <p:cNvSpPr/>
           <p:nvPr/>
         </p:nvSpPr>
@@ -3414,7 +3588,7 @@
       </p:sp>
       <p:sp>
         <p:nvSpPr>
-          <p:cNvPr id="47" name="Text 44"/>
+          <p:cNvPr id="52" name="Text 49"/>
           <p:cNvSpPr txBox="1"/>
           <p:nvPr/>
         </p:nvSpPr>
@@ -3453,7 +3627,7 @@
       </p:sp>
       <p:sp>
         <p:nvSpPr>
-          <p:cNvPr id="48" name="Text 45"/>
+          <p:cNvPr id="53" name="Text 50"/>
           <p:cNvSpPr txBox="1"/>
           <p:nvPr/>
         </p:nvSpPr>
@@ -3492,7 +3666,7 @@
       </p:sp>
       <p:sp>
         <p:nvSpPr>
-          <p:cNvPr id="49" name="Shape 46"/>
+          <p:cNvPr id="54" name="Shape 51"/>
           <p:cNvSpPr/>
           <p:nvPr/>
         </p:nvSpPr>
@@ -3519,7 +3693,7 @@
       </p:sp>
       <p:sp>
         <p:nvSpPr>
-          <p:cNvPr id="50" name="Text 47"/>
+          <p:cNvPr id="55" name="Text 52"/>
           <p:cNvSpPr txBox="1"/>
           <p:nvPr/>
         </p:nvSpPr>
@@ -3558,7 +3732,7 @@
       </p:sp>
       <p:sp>
         <p:nvSpPr>
-          <p:cNvPr id="51" name="Text 48"/>
+          <p:cNvPr id="56" name="Text 53"/>
           <p:cNvSpPr txBox="1"/>
           <p:nvPr/>
         </p:nvSpPr>
@@ -3597,7 +3771,7 @@
       </p:sp>
       <p:sp>
         <p:nvSpPr>
-          <p:cNvPr id="52" name="Shape 49"/>
+          <p:cNvPr id="57" name="Shape 54"/>
           <p:cNvSpPr/>
           <p:nvPr/>
         </p:nvSpPr>
@@ -3624,7 +3798,7 @@
       </p:sp>
       <p:sp>
         <p:nvSpPr>
-          <p:cNvPr id="53" name="Text 50"/>
+          <p:cNvPr id="58" name="Text 55"/>
           <p:cNvSpPr txBox="1"/>
           <p:nvPr/>
         </p:nvSpPr>
@@ -3663,7 +3837,7 @@
       </p:sp>
       <p:sp>
         <p:nvSpPr>
-          <p:cNvPr id="54" name="Text 51"/>
+          <p:cNvPr id="59" name="Text 56"/>
           <p:cNvSpPr txBox="1"/>
           <p:nvPr/>
         </p:nvSpPr>
@@ -3702,7 +3876,7 @@
       </p:sp>
       <p:sp>
         <p:nvSpPr>
-          <p:cNvPr id="55" name="Shape 52"/>
+          <p:cNvPr id="60" name="Shape 57"/>
           <p:cNvSpPr/>
           <p:nvPr/>
         </p:nvSpPr>
@@ -3729,7 +3903,7 @@
       </p:sp>
       <p:sp>
         <p:nvSpPr>
-          <p:cNvPr id="56" name="Text 53"/>
+          <p:cNvPr id="61" name="Text 58"/>
           <p:cNvSpPr txBox="1"/>
           <p:nvPr/>
         </p:nvSpPr>
@@ -3768,7 +3942,7 @@
       </p:sp>
       <p:sp>
         <p:nvSpPr>
-          <p:cNvPr id="57" name="Text 54"/>
+          <p:cNvPr id="62" name="Text 59"/>
           <p:cNvSpPr txBox="1"/>
           <p:nvPr/>
         </p:nvSpPr>
@@ -3799,7 +3973,7 @@
                 <a:ea typeface="Calibri" pitchFamily="34" charset="-122"/>
                 <a:cs typeface="Calibri" pitchFamily="34" charset="-120"/>
               </a:rPr>
-              <a:t>後継体制の確立後に検討</a:t>
+              <a:t>ワインバー・スイーツ等の1品業態</a:t>
             </a:r>
             <a:endParaRPr lang="en-US" sz="850" dirty="0"/>
           </a:p>
@@ -3807,7 +3981,7 @@
       </p:sp>
       <p:sp>
         <p:nvSpPr>
-          <p:cNvPr id="58" name="Text 55"/>
+          <p:cNvPr id="63" name="Text 60"/>
           <p:cNvSpPr txBox="1"/>
           <p:nvPr/>
         </p:nvSpPr>
@@ -3846,7 +4020,7 @@
       </p:sp>
       <p:sp>
         <p:nvSpPr>
-          <p:cNvPr id="59" name="Text 56"/>
+          <p:cNvPr id="64" name="Text 61"/>
           <p:cNvSpPr txBox="1"/>
           <p:nvPr/>
         </p:nvSpPr>
